--- a/lessons/3-7/slides.pptx
+++ b/lessons/3-7/slides.pptx
@@ -694,7 +694,7 @@
           <a:p>
             <a:r>
               <a:rPr lang="en-US" dirty="0"/>
-              <a:t>Answer key — $0.75 × 10 = $7.50 (multiply the unit rate, don't add)</a:t>
+              <a:t>Answer key — Step 2 compares numbers that are measured in different units. Convert first: 5 kilometers ≈ 0.6 × 5 = 3 miles. Comparing 3 miles with 5 miles shows that 5 miles is the longer distance.</a:t>
             </a:r>
             <a:endParaRPr lang="en-US" dirty="0"/>
           </a:p>
@@ -2452,7 +2452,7 @@
                 <a:ea typeface="Outfit" pitchFamily="34" charset="-122"/>
                 <a:cs typeface="Outfit" pitchFamily="34" charset="-120"/>
               </a:rPr>
-              <a:t>Ratio and Rate Problem Solving</a:t>
+              <a:t>Ratio Reasoning: Convert Measurements Between Systems</a:t>
             </a:r>
             <a:endParaRPr lang="en-US" sz="3000" dirty="0"/>
           </a:p>
@@ -2495,7 +2495,7 @@
                 <a:ea typeface="Outfit" pitchFamily="34" charset="-122"/>
                 <a:cs typeface="Outfit" pitchFamily="34" charset="-120"/>
               </a:rPr>
-              <a:t>6.AT.3</a:t>
+              <a:t>6.AT.3c</a:t>
             </a:r>
             <a:endParaRPr lang="en-US" sz="1000" dirty="0"/>
           </a:p>
@@ -2919,7 +2919,7 @@
                 <a:ea typeface="Hanken Grotesk" pitchFamily="34" charset="-122"/>
                 <a:cs typeface="Hanken Grotesk" pitchFamily="34" charset="-120"/>
               </a:rPr>
-              <a:t>I can solve real-world rate problems by finding and using unit rates.</a:t>
+              <a:t>I can use ratio reasoning to convert measurements between the customary and metric systems.</a:t>
             </a:r>
             <a:endParaRPr lang="en-US" sz="1100" dirty="0"/>
           </a:p>
@@ -3045,7 +3045,7 @@
                 <a:ea typeface="Hanken Grotesk" pitchFamily="34" charset="-122"/>
                 <a:cs typeface="Hanken Grotesk" pitchFamily="34" charset="-120"/>
               </a:rPr>
-              <a:t>I can explain my solution using the words rate, unit rate, per, and proportion.</a:t>
+              <a:t>I can explain a conversion between systems using the words conversion factor, approximately, customary, and metric.</a:t>
             </a:r>
             <a:endParaRPr lang="en-US" sz="1050" dirty="0"/>
           </a:p>
@@ -3218,7 +3218,7 @@
                 <a:ea typeface="Outfit" pitchFamily="34" charset="-122"/>
                 <a:cs typeface="Outfit" pitchFamily="34" charset="-120"/>
               </a:rPr>
-              <a:t>6.AT.3</a:t>
+              <a:t>6.AT.3c</a:t>
             </a:r>
             <a:endParaRPr lang="en-US" sz="900" dirty="0"/>
           </a:p>
@@ -3549,7 +3549,7 @@
                 <a:ea typeface="Outfit" pitchFamily="34" charset="-122"/>
                 <a:cs typeface="Outfit" pitchFamily="34" charset="-120"/>
               </a:rPr>
-              <a:t>Team 1 knows that 3 pounds of chicken cost $18. Complete the ratio table to find the cost for different amounts, then determine the unit rate.</a:t>
+              <a:t>Sort each unit into the measurement system it belongs to. Converting between systems always crosses this line.</a:t>
             </a:r>
             <a:endParaRPr lang="en-US" sz="1050" dirty="0"/>
           </a:p>
@@ -3635,7 +3635,7 @@
                 <a:ea typeface="Hanken Grotesk" pitchFamily="34" charset="-122"/>
                 <a:cs typeface="Hanken Grotesk" pitchFamily="34" charset="-120"/>
               </a:rPr>
-              <a:t>Card 1</a:t>
+              <a:t>mile</a:t>
             </a:r>
             <a:endParaRPr lang="en-US" sz="900" dirty="0"/>
           </a:p>
@@ -3682,7 +3682,7 @@
                 <a:ea typeface="Hanken Grotesk" pitchFamily="34" charset="-122"/>
                 <a:cs typeface="Hanken Grotesk" pitchFamily="34" charset="-120"/>
               </a:rPr>
-              <a:t>Card 2</a:t>
+              <a:t>kilometer</a:t>
             </a:r>
             <a:endParaRPr lang="en-US" sz="900" dirty="0"/>
           </a:p>
@@ -3729,7 +3729,7 @@
                 <a:ea typeface="Hanken Grotesk" pitchFamily="34" charset="-122"/>
                 <a:cs typeface="Hanken Grotesk" pitchFamily="34" charset="-120"/>
               </a:rPr>
-              <a:t>Card 3</a:t>
+              <a:t>pound</a:t>
             </a:r>
             <a:endParaRPr lang="en-US" sz="900" dirty="0"/>
           </a:p>
@@ -3776,7 +3776,7 @@
                 <a:ea typeface="Hanken Grotesk" pitchFamily="34" charset="-122"/>
                 <a:cs typeface="Hanken Grotesk" pitchFamily="34" charset="-120"/>
               </a:rPr>
-              <a:t>Card 4</a:t>
+              <a:t>kilogram</a:t>
             </a:r>
             <a:endParaRPr lang="en-US" sz="900" dirty="0"/>
           </a:p>
@@ -3784,7 +3784,101 @@
       </p:sp>
       <p:sp>
         <p:nvSpPr>
-          <p:cNvPr id="24" name="Shape 22"/>
+          <p:cNvPr id="24" name="Text 22"/>
+          <p:cNvSpPr/>
+          <p:nvPr/>
+        </p:nvSpPr>
+        <p:spPr>
+          <a:xfrm>
+            <a:off x="2362200" y="1975104"/>
+            <a:ext cx="1630680" cy="384048"/>
+          </a:xfrm>
+          <a:prstGeom prst="roundRect">
+            <a:avLst>
+              <a:gd name="adj" fmla="val 11905"/>
+            </a:avLst>
+          </a:prstGeom>
+          <a:solidFill>
+            <a:srgbClr val="FBEFD0"/>
+          </a:solidFill>
+          <a:ln w="12700">
+            <a:solidFill>
+              <a:srgbClr val="D6DBDF"/>
+            </a:solidFill>
+          </a:ln>
+        </p:spPr>
+        <p:txBody>
+          <a:bodyPr wrap="square" rtlCol="0" anchor="ctr"/>
+          <a:lstStyle/>
+          <a:p>
+            <a:pPr algn="ctr" indent="0" marL="0">
+              <a:buNone/>
+            </a:pPr>
+            <a:r>
+              <a:rPr lang="en-US" sz="900" b="1" dirty="0">
+                <a:solidFill>
+                  <a:srgbClr val="17324D"/>
+                </a:solidFill>
+                <a:latin typeface="Hanken Grotesk" pitchFamily="34" charset="0"/>
+                <a:ea typeface="Hanken Grotesk" pitchFamily="34" charset="-122"/>
+                <a:cs typeface="Hanken Grotesk" pitchFamily="34" charset="-120"/>
+              </a:rPr>
+              <a:t>inch</a:t>
+            </a:r>
+            <a:endParaRPr lang="en-US" sz="900" dirty="0"/>
+          </a:p>
+        </p:txBody>
+      </p:sp>
+      <p:sp>
+        <p:nvSpPr>
+          <p:cNvPr id="25" name="Text 23"/>
+          <p:cNvSpPr/>
+          <p:nvPr/>
+        </p:nvSpPr>
+        <p:spPr>
+          <a:xfrm>
+            <a:off x="4130040" y="1975104"/>
+            <a:ext cx="1630680" cy="384048"/>
+          </a:xfrm>
+          <a:prstGeom prst="roundRect">
+            <a:avLst>
+              <a:gd name="adj" fmla="val 11905"/>
+            </a:avLst>
+          </a:prstGeom>
+          <a:solidFill>
+            <a:srgbClr val="FBEFD0"/>
+          </a:solidFill>
+          <a:ln w="12700">
+            <a:solidFill>
+              <a:srgbClr val="D6DBDF"/>
+            </a:solidFill>
+          </a:ln>
+        </p:spPr>
+        <p:txBody>
+          <a:bodyPr wrap="square" rtlCol="0" anchor="ctr"/>
+          <a:lstStyle/>
+          <a:p>
+            <a:pPr algn="ctr" indent="0" marL="0">
+              <a:buNone/>
+            </a:pPr>
+            <a:r>
+              <a:rPr lang="en-US" sz="900" b="1" dirty="0">
+                <a:solidFill>
+                  <a:srgbClr val="17324D"/>
+                </a:solidFill>
+                <a:latin typeface="Hanken Grotesk" pitchFamily="34" charset="0"/>
+                <a:ea typeface="Hanken Grotesk" pitchFamily="34" charset="-122"/>
+                <a:cs typeface="Hanken Grotesk" pitchFamily="34" charset="-120"/>
+              </a:rPr>
+              <a:t>centimeter</a:t>
+            </a:r>
+            <a:endParaRPr lang="en-US" sz="900" dirty="0"/>
+          </a:p>
+        </p:txBody>
+      </p:sp>
+      <p:sp>
+        <p:nvSpPr>
+          <p:cNvPr id="26" name="Shape 24"/>
           <p:cNvSpPr/>
           <p:nvPr/>
         </p:nvSpPr>
@@ -3818,7 +3912,7 @@
       </p:sp>
       <p:sp>
         <p:nvSpPr>
-          <p:cNvPr id="25" name="Text 23"/>
+          <p:cNvPr id="27" name="Text 25"/>
           <p:cNvSpPr/>
           <p:nvPr/>
         </p:nvSpPr>
@@ -3851,7 +3945,7 @@
                 <a:ea typeface="Outfit" pitchFamily="34" charset="-122"/>
                 <a:cs typeface="Outfit" pitchFamily="34" charset="-120"/>
               </a:rPr>
-              <a:t>Group A</a:t>
+              <a:t>Customary</a:t>
             </a:r>
             <a:endParaRPr lang="en-US" sz="950" dirty="0"/>
           </a:p>
@@ -3859,7 +3953,7 @@
       </p:sp>
       <p:sp>
         <p:nvSpPr>
-          <p:cNvPr id="26" name="Shape 24"/>
+          <p:cNvPr id="28" name="Shape 26"/>
           <p:cNvSpPr/>
           <p:nvPr/>
         </p:nvSpPr>
@@ -3893,7 +3987,7 @@
       </p:sp>
       <p:sp>
         <p:nvSpPr>
-          <p:cNvPr id="27" name="Text 25"/>
+          <p:cNvPr id="29" name="Text 27"/>
           <p:cNvSpPr/>
           <p:nvPr/>
         </p:nvSpPr>
@@ -3926,7 +4020,7 @@
                 <a:ea typeface="Outfit" pitchFamily="34" charset="-122"/>
                 <a:cs typeface="Outfit" pitchFamily="34" charset="-120"/>
               </a:rPr>
-              <a:t>Group B</a:t>
+              <a:t>Metric</a:t>
             </a:r>
             <a:endParaRPr lang="en-US" sz="950" dirty="0"/>
           </a:p>
@@ -3934,7 +4028,7 @@
       </p:sp>
       <p:sp>
         <p:nvSpPr>
-          <p:cNvPr id="28" name="Shape 26"/>
+          <p:cNvPr id="30" name="Shape 28"/>
           <p:cNvSpPr/>
           <p:nvPr/>
         </p:nvSpPr>
@@ -3968,7 +4062,7 @@
       </p:sp>
       <p:sp>
         <p:nvSpPr>
-          <p:cNvPr id="29" name="Text 27"/>
+          <p:cNvPr id="31" name="Text 29"/>
           <p:cNvSpPr/>
           <p:nvPr/>
         </p:nvSpPr>
@@ -4009,7 +4103,7 @@
       </p:sp>
       <p:sp>
         <p:nvSpPr>
-          <p:cNvPr id="30" name="Text 28"/>
+          <p:cNvPr id="32" name="Text 30"/>
           <p:cNvSpPr/>
           <p:nvPr/>
         </p:nvSpPr>
@@ -4040,7 +4134,7 @@
                 <a:ea typeface="Hanken Grotesk" pitchFamily="34" charset="-122"/>
                 <a:cs typeface="Hanken Grotesk" pitchFamily="34" charset="-120"/>
               </a:rPr>
-              <a:t>Team 2 frosts 5 cupcakes every 4 minutes. How did you set up a rate or proportion to find how many cupcakes they frost in a longer time?</a:t>
+              <a:t>To convert between systems you used a conversion factor like 1 km ≈ 0.6 mi as a RATIO. How does writing it as the ratio 1 : 0.6 let a table do the converting for you?</a:t>
             </a:r>
             <a:endParaRPr lang="en-US" sz="1000" dirty="0"/>
           </a:p>
@@ -4048,7 +4142,7 @@
       </p:sp>
       <p:sp>
         <p:nvSpPr>
-          <p:cNvPr id="31" name="Shape 29"/>
+          <p:cNvPr id="33" name="Shape 31"/>
           <p:cNvSpPr/>
           <p:nvPr/>
         </p:nvSpPr>
@@ -4071,7 +4165,7 @@
       </p:sp>
       <p:sp>
         <p:nvSpPr>
-          <p:cNvPr id="32" name="Shape 30"/>
+          <p:cNvPr id="34" name="Shape 32"/>
           <p:cNvSpPr/>
           <p:nvPr/>
         </p:nvSpPr>
@@ -4094,7 +4188,7 @@
       </p:sp>
       <p:sp>
         <p:nvSpPr>
-          <p:cNvPr id="33" name="Shape 31"/>
+          <p:cNvPr id="35" name="Shape 33"/>
           <p:cNvSpPr/>
           <p:nvPr/>
         </p:nvSpPr>
@@ -4117,7 +4211,7 @@
       </p:sp>
       <p:sp>
         <p:nvSpPr>
-          <p:cNvPr id="34" name="Shape 32"/>
+          <p:cNvPr id="36" name="Shape 34"/>
           <p:cNvSpPr/>
           <p:nvPr/>
         </p:nvSpPr>
@@ -4140,7 +4234,7 @@
       </p:sp>
       <p:sp>
         <p:nvSpPr>
-          <p:cNvPr id="35" name="Shape 33"/>
+          <p:cNvPr id="37" name="Shape 35"/>
           <p:cNvSpPr/>
           <p:nvPr/>
         </p:nvSpPr>
@@ -4328,7 +4422,7 @@
                 <a:ea typeface="Outfit" pitchFamily="34" charset="-122"/>
                 <a:cs typeface="Outfit" pitchFamily="34" charset="-120"/>
               </a:rPr>
-              <a:t>6.AT.3</a:t>
+              <a:t>6.AT.3c</a:t>
             </a:r>
             <a:endParaRPr lang="en-US" sz="900" dirty="0"/>
           </a:p>
@@ -4702,7 +4796,7 @@
                 <a:ea typeface="Outfit" pitchFamily="34" charset="-122"/>
                 <a:cs typeface="Outfit" pitchFamily="34" charset="-120"/>
               </a:rPr>
-              <a:t>Find Mia's Mistake</a:t>
+              <a:t>Find the error</a:t>
             </a:r>
             <a:endParaRPr lang="en-US" sz="1100" dirty="0"/>
           </a:p>
@@ -4867,7 +4961,7 @@
                 <a:ea typeface="Hanken Grotesk" pitchFamily="34" charset="-122"/>
                 <a:cs typeface="Hanken Grotesk" pitchFamily="34" charset="-120"/>
               </a:rPr>
-              <a:t>Read the problem:  </a:t>
+              <a:t>Setup:  </a:t>
             </a:r>
             <a:pPr indent="0" marL="0">
               <a:buNone/>
@@ -4881,7 +4975,7 @@
                 <a:ea typeface="Courier New" pitchFamily="34" charset="-122"/>
                 <a:cs typeface="Courier New" pitchFamily="34" charset="-120"/>
               </a:rPr>
-              <a:t>A store sells 6 oranges for $4.50. What is the cost of 10 oranges?</a:t>
+              <a:t>Which is longer, 5 kilometers or 5 miles? (1 km ≈ 0.6 mi)</a:t>
             </a:r>
             <a:endParaRPr lang="en-US" sz="950" dirty="0"/>
           </a:p>
@@ -4934,7 +5028,7 @@
                 <a:ea typeface="Hanken Grotesk" pitchFamily="34" charset="-122"/>
                 <a:cs typeface="Hanken Grotesk" pitchFamily="34" charset="-120"/>
               </a:rPr>
-              <a:t>Find the unit rate:  </a:t>
+              <a:t>Step 1:  </a:t>
             </a:r>
             <a:pPr indent="0" marL="0">
               <a:buNone/>
@@ -4948,7 +5042,7 @@
                 <a:ea typeface="Courier New" pitchFamily="34" charset="-122"/>
                 <a:cs typeface="Courier New" pitchFamily="34" charset="-120"/>
               </a:rPr>
-              <a:t>$4.50 ÷ 6 = $0.75 per orange</a:t>
+              <a:t>Both numbers are 5.</a:t>
             </a:r>
             <a:endParaRPr lang="en-US" sz="950" dirty="0"/>
           </a:p>
@@ -5001,7 +5095,7 @@
                 <a:ea typeface="Hanken Grotesk" pitchFamily="34" charset="-122"/>
                 <a:cs typeface="Hanken Grotesk" pitchFamily="34" charset="-120"/>
               </a:rPr>
-              <a:t>Multiply for 10 oranges:  </a:t>
+              <a:t>Step 2:  </a:t>
             </a:r>
             <a:pPr indent="0" marL="0">
               <a:buNone/>
@@ -5015,7 +5109,7 @@
                 <a:ea typeface="Courier New" pitchFamily="34" charset="-122"/>
                 <a:cs typeface="Courier New" pitchFamily="34" charset="-120"/>
               </a:rPr>
-              <a:t>$0.75 + 10 = $10.75</a:t>
+              <a:t>The units are different, so I compare the numbers: they are equal.</a:t>
             </a:r>
             <a:endParaRPr lang="en-US" sz="950" dirty="0"/>
           </a:p>
@@ -5068,7 +5162,7 @@
                 <a:ea typeface="Hanken Grotesk" pitchFamily="34" charset="-122"/>
                 <a:cs typeface="Hanken Grotesk" pitchFamily="34" charset="-120"/>
               </a:rPr>
-              <a:t>Answer:  </a:t>
+              <a:t>Step 3:  </a:t>
             </a:r>
             <a:pPr indent="0" marL="0">
               <a:buNone/>
@@ -5082,7 +5176,7 @@
                 <a:ea typeface="Courier New" pitchFamily="34" charset="-122"/>
                 <a:cs typeface="Courier New" pitchFamily="34" charset="-120"/>
               </a:rPr>
-              <a:t>10 oranges cost $10.75</a:t>
+              <a:t>5 kilometers is the same distance as 5 miles.</a:t>
             </a:r>
             <a:endParaRPr lang="en-US" sz="950" dirty="0"/>
           </a:p>
@@ -5664,7 +5758,7 @@
                 <a:ea typeface="Outfit" pitchFamily="34" charset="-122"/>
                 <a:cs typeface="Outfit" pitchFamily="34" charset="-120"/>
               </a:rPr>
-              <a:t>6.AT.3</a:t>
+              <a:t>6.AT.3c</a:t>
             </a:r>
             <a:endParaRPr lang="en-US" sz="900" dirty="0"/>
           </a:p>
@@ -6095,7 +6189,7 @@
                 <a:ea typeface="Hanken Grotesk" pitchFamily="34" charset="-122"/>
                 <a:cs typeface="Hanken Grotesk" pitchFamily="34" charset="-120"/>
               </a:rPr>
-              <a:t>Team 1 knows that 3 pounds of chicken cost $18.</a:t>
+              <a:t>Evelyn sees a Canadian highway sign reading 100 kilometers per hour and wonders whether that is faster or slower than 100 miles per hour.</a:t>
             </a:r>
             <a:endParaRPr lang="en-US" sz="1050" dirty="0"/>
           </a:p>
@@ -6193,7 +6287,7 @@
                 <a:ea typeface="Hanken Grotesk" pitchFamily="34" charset="-122"/>
                 <a:cs typeface="Hanken Grotesk" pitchFamily="34" charset="-120"/>
               </a:rPr>
-              <a:t>To find the unit rate, I divide the cost by the pounds: 18 divided by 3 = $6 per pound.</a:t>
+              <a:t>Kilometers are metric and miles are customary, so 100 and 100 cannot be compared as they stand. Both measure distance, so a conversion factor links them: 1 kilometer ≈ 0.6 mile, or the ratio 1 : 0.6.</a:t>
             </a:r>
             <a:endParaRPr lang="en-US" sz="1050" dirty="0"/>
           </a:p>
@@ -6291,7 +6385,7 @@
                 <a:ea typeface="Hanken Grotesk" pitchFamily="34" charset="-122"/>
                 <a:cs typeface="Hanken Grotesk" pitchFamily="34" charset="-120"/>
               </a:rPr>
-              <a:t>Now I can find any amount. For 5 pounds, I multiply: 6 x 5 = $30.</a:t>
+              <a:t>I build a ratio table from that unit ratio. Kilometers 1, 10, 100 pair with miles 0.6, 6, 60 — each column multiplies both numbers by the same factor.</a:t>
             </a:r>
             <a:endParaRPr lang="en-US" sz="1050" dirty="0"/>
           </a:p>
@@ -6389,7 +6483,7 @@
                 <a:ea typeface="Hanken Grotesk" pitchFamily="34" charset="-122"/>
                 <a:cs typeface="Hanken Grotesk" pitchFamily="34" charset="-120"/>
               </a:rPr>
-              <a:t>For 8 pounds, I multiply: 6 x 8 = $48.</a:t>
+              <a:t>So 100 kilometers ≈ 60 miles, which means 100 kilometers per hour ≈ 60 miles per hour.</a:t>
             </a:r>
             <a:endParaRPr lang="en-US" sz="1050" dirty="0"/>
           </a:p>
@@ -6487,7 +6581,7 @@
                 <a:ea typeface="Hanken Grotesk" pitchFamily="34" charset="-122"/>
                 <a:cs typeface="Hanken Grotesk" pitchFamily="34" charset="-120"/>
               </a:rPr>
-              <a:t>The unit rate $6 per pound is the shortcut for every amount.</a:t>
+              <a:t>Now the comparison is fair: 100 miles per hour is faster, because in one hour you would travel 100 miles instead of only about 60.</a:t>
             </a:r>
             <a:endParaRPr lang="en-US" sz="1050" dirty="0"/>
           </a:p>
@@ -6958,7 +7052,7 @@
                 <a:ea typeface="Outfit" pitchFamily="34" charset="-122"/>
                 <a:cs typeface="Outfit" pitchFamily="34" charset="-120"/>
               </a:rPr>
-              <a:t>6.AT.3</a:t>
+              <a:t>6.AT.3c</a:t>
             </a:r>
             <a:endParaRPr lang="en-US" sz="900" dirty="0"/>
           </a:p>
@@ -7403,7 +7497,7 @@
                 <a:ea typeface="Hanken Grotesk" pitchFamily="34" charset="-122"/>
                 <a:cs typeface="Hanken Grotesk" pitchFamily="34" charset="-120"/>
               </a:rPr>
-              <a:t>Sketch a model for today's problem. Label it using Rate and Unit rate.</a:t>
+              <a:t>Sketch a model for today's problem. Label it using Convert Measurements Between Systems and Conversion factor.</a:t>
             </a:r>
             <a:endParaRPr lang="en-US" sz="1000" dirty="0"/>
           </a:p>
@@ -7551,7 +7645,7 @@
                 <a:ea typeface="Hanken Grotesk" pitchFamily="34" charset="-122"/>
                 <a:cs typeface="Hanken Grotesk" pitchFamily="34" charset="-120"/>
               </a:rPr>
-              <a:t>In 2–3 sentences, explain "Find the unit rate by dividing, then multiply it to find the amount you need." in your own words.</a:t>
+              <a:t>In 2–3 sentences, explain "Converting Measurements Between Systems. 1. Identify the conversion ratio connecting systems (e.g. 1 in = 2.54 cm, 1 kg ≈ 2.2 lbs). 2. Set up a ratio table or proportion aligning customary and metric units. 3. Multiply or divide by the conversion factor to compute the equivalent measurement" in your own words.</a:t>
             </a:r>
             <a:endParaRPr lang="en-US" sz="1000" dirty="0"/>
           </a:p>
@@ -7847,7 +7941,7 @@
                 <a:ea typeface="Hanken Grotesk" pitchFamily="34" charset="-122"/>
                 <a:cs typeface="Hanken Grotesk" pitchFamily="34" charset="-120"/>
               </a:rPr>
-              <a:t>Write your own problem that uses Rate, then solve it and make an answer key.</a:t>
+              <a:t>Write your own problem that uses Convert Measurements Between Systems, then solve it and make an answer key.</a:t>
             </a:r>
             <a:endParaRPr lang="en-US" sz="1000" dirty="0"/>
           </a:p>
@@ -8020,7 +8114,7 @@
                 <a:ea typeface="Outfit" pitchFamily="34" charset="-122"/>
                 <a:cs typeface="Outfit" pitchFamily="34" charset="-120"/>
               </a:rPr>
-              <a:t>6.AT.3</a:t>
+              <a:t>6.AT.3c</a:t>
             </a:r>
             <a:endParaRPr lang="en-US" sz="900" dirty="0"/>
           </a:p>
@@ -8408,7 +8502,7 @@
                 <a:ea typeface="Hanken Grotesk" pitchFamily="34" charset="-122"/>
                 <a:cs typeface="Hanken Grotesk" pitchFamily="34" charset="-120"/>
               </a:rPr>
-              <a:t>A car travels 150 miles in 3 hours. A bus travels 200 miles in 5 hours. Which vehicle is faster?</a:t>
+              <a:t>A dog weighs 31 pounds. Flea medicine comes in packages for 4–10 kg, 10–25 kg, and 25–40 kg. Which package is correct?</a:t>
             </a:r>
             <a:endParaRPr lang="en-US" sz="1050" dirty="0"/>
           </a:p>
@@ -8484,7 +8578,7 @@
                 <a:ea typeface="Hanken Grotesk" pitchFamily="34" charset="-122"/>
                 <a:cs typeface="Hanken Grotesk" pitchFamily="34" charset="-120"/>
               </a:rPr>
-              <a:t>A bakery makes 24 cookies in 3 batches. What is the unit rate of cookies per batch?</a:t>
+              <a:t>Converting between systems: sort each conversion by what happens to the number.</a:t>
             </a:r>
             <a:endParaRPr lang="en-US" sz="1050" dirty="0"/>
           </a:p>
@@ -8560,7 +8654,7 @@
                 <a:ea typeface="Hanken Grotesk" pitchFamily="34" charset="-122"/>
                 <a:cs typeface="Hanken Grotesk" pitchFamily="34" charset="-120"/>
               </a:rPr>
-              <a:t>Apples cost $5 for 4 pounds. What is the cost per pound?</a:t>
+              <a:t>One of the academy's suppliers ships olive oil in 4-liter tins. Using 1 liter ≈ 1.06 quarts, about how many quarts of oil are in one tin?</a:t>
             </a:r>
             <a:endParaRPr lang="en-US" sz="1050" dirty="0"/>
           </a:p>
@@ -8697,7 +8791,7 @@
                 <a:ea typeface="Hanken Grotesk" pitchFamily="34" charset="-122"/>
                 <a:cs typeface="Hanken Grotesk" pitchFamily="34" charset="-120"/>
               </a:rPr>
-              <a:t>Tell about a real situation where rates matter, like speed, pay, or price, and explain how the unit rate helps you.</a:t>
+              <a:t>Evelyn sees a 100 km/h speed sign in Canada, and at home her highway limit is 65 mi/h. One partner should convert with the table, the other with 100 × 0.6. Is 100 km/h faster or slower than her usual 65 mi/h?</a:t>
             </a:r>
             <a:endParaRPr lang="en-US" sz="1000" dirty="0"/>
           </a:p>
@@ -8985,7 +9079,7 @@
                 <a:ea typeface="Outfit" pitchFamily="34" charset="-122"/>
                 <a:cs typeface="Outfit" pitchFamily="34" charset="-120"/>
               </a:rPr>
-              <a:t>6.AT.3</a:t>
+              <a:t>6.AT.3c</a:t>
             </a:r>
             <a:endParaRPr lang="en-US" sz="900" dirty="0"/>
           </a:p>
@@ -9408,7 +9502,7 @@
                 <a:ea typeface="Hanken Grotesk" pitchFamily="34" charset="-122"/>
                 <a:cs typeface="Hanken Grotesk" pitchFamily="34" charset="-120"/>
               </a:rPr>
-              <a:t>Today's key idea is "Find the unit rate by dividing, then multiply it to find the amount you need." — and it works because ___.</a:t>
+              <a:t>Today's key idea is "Converting Measurements Between Systems. 1. Identify the conversion ratio connecting systems (e.g. 1 in = 2.54 cm, 1 kg ≈ 2.2 lbs). 2. Set up a ratio table or proportion aligning customary and metric units. 3. Multiply or divide by the conversion factor to compute the equivalent measurement" — and it works because ___.</a:t>
             </a:r>
             <a:endParaRPr lang="en-US" sz="1050" dirty="0"/>
           </a:p>
@@ -9557,7 +9651,7 @@
                 <a:ea typeface="Hanken Grotesk" pitchFamily="34" charset="-122"/>
                 <a:cs typeface="Hanken Grotesk" pitchFamily="34" charset="-120"/>
               </a:rPr>
-              <a:t>Because Rate means ___, but a tricky part is ___, so I have to ___.</a:t>
+              <a:t>Because Convert Measurements Between Systems means ___, but a tricky part is ___, so I have to ___.</a:t>
             </a:r>
             <a:endParaRPr lang="en-US" sz="1050" dirty="0"/>
           </a:p>
@@ -9706,7 +9800,7 @@
                 <a:ea typeface="Hanken Grotesk" pitchFamily="34" charset="-122"/>
                 <a:cs typeface="Hanken Grotesk" pitchFamily="34" charset="-120"/>
               </a:rPr>
-              <a:t>A common mistake with Rate is ___. It happens because ___, and the fix is ___.</a:t>
+              <a:t>A common mistake with Convert Measurements Between Systems is ___. It happens because ___, and the fix is ___.</a:t>
             </a:r>
             <a:endParaRPr lang="en-US" sz="1050" dirty="0"/>
           </a:p>
@@ -9902,7 +9996,7 @@
                 <a:ea typeface="Outfit" pitchFamily="34" charset="-122"/>
                 <a:cs typeface="Outfit" pitchFamily="34" charset="-120"/>
               </a:rPr>
-              <a:t>6.AT.3</a:t>
+              <a:t>6.AT.3c</a:t>
             </a:r>
             <a:endParaRPr lang="en-US" sz="900" dirty="0"/>
           </a:p>
@@ -10579,7 +10673,7 @@
                 <a:ea typeface="Hanken Grotesk" pitchFamily="34" charset="-122"/>
                 <a:cs typeface="Hanken Grotesk" pitchFamily="34" charset="-120"/>
               </a:rPr>
-              <a:t>A printer prints 30 pages in 5 minutes. At this rate, how many pages will it print in 12 minutes?</a:t>
+              <a:t>A highway sign in Canada reads 100 km/h. Using 1 km ≈ 0.6 mi, is that faster or slower than 100 mi/h?</a:t>
             </a:r>
             <a:endParaRPr lang="en-US" sz="1050" dirty="0"/>
           </a:p>
@@ -10618,7 +10712,7 @@
                 <a:ea typeface="Hanken Grotesk" pitchFamily="34" charset="-122"/>
                 <a:cs typeface="Hanken Grotesk" pitchFamily="34" charset="-120"/>
               </a:rPr>
-              <a:t>A.  72</a:t>
+              <a:t>A.  Faster — 100 km/h is about 160 mi/h</a:t>
             </a:r>
             <a:endParaRPr lang="en-US" sz="1000" dirty="0"/>
           </a:p>
@@ -10657,7 +10751,7 @@
                 <a:ea typeface="Hanken Grotesk" pitchFamily="34" charset="-122"/>
                 <a:cs typeface="Hanken Grotesk" pitchFamily="34" charset="-120"/>
               </a:rPr>
-              <a:t>B.  60</a:t>
+              <a:t>B.  The same, because both numbers are 100</a:t>
             </a:r>
             <a:endParaRPr lang="en-US" sz="1000" dirty="0"/>
           </a:p>
@@ -10696,7 +10790,7 @@
                 <a:ea typeface="Hanken Grotesk" pitchFamily="34" charset="-122"/>
                 <a:cs typeface="Hanken Grotesk" pitchFamily="34" charset="-120"/>
               </a:rPr>
-              <a:t>C.  36</a:t>
+              <a:t>C.  Slower — 100 km/h is about 60 mi/h</a:t>
             </a:r>
             <a:endParaRPr lang="en-US" sz="1000" dirty="0"/>
           </a:p>
@@ -10735,7 +10829,7 @@
                 <a:ea typeface="Hanken Grotesk" pitchFamily="34" charset="-122"/>
                 <a:cs typeface="Hanken Grotesk" pitchFamily="34" charset="-120"/>
               </a:rPr>
-              <a:t>D.  42</a:t>
+              <a:t>D.  You cannot compare two different systems</a:t>
             </a:r>
             <a:endParaRPr lang="en-US" sz="1000" dirty="0"/>
           </a:p>
@@ -11030,7 +11124,7 @@
                 <a:ea typeface="Outfit" pitchFamily="34" charset="-122"/>
                 <a:cs typeface="Outfit" pitchFamily="34" charset="-120"/>
               </a:rPr>
-              <a:t>6.AT.3</a:t>
+              <a:t>6.AT.3c</a:t>
             </a:r>
             <a:endParaRPr lang="en-US" sz="900" dirty="0"/>
           </a:p>
@@ -11363,7 +11457,7 @@
                 <a:ea typeface="Hanken Grotesk" pitchFamily="34" charset="-122"/>
                 <a:cs typeface="Hanken Grotesk" pitchFamily="34" charset="-120"/>
               </a:rPr>
-              <a:t>I can solve real-world rate problems by finding and using unit rates.</a:t>
+              <a:t>I can use ratio reasoning to convert measurements between the customary and metric systems.</a:t>
             </a:r>
             <a:endParaRPr lang="en-US" sz="1100" dirty="0"/>
           </a:p>
@@ -12463,7 +12557,7 @@
                 <a:ea typeface="Outfit" pitchFamily="34" charset="-122"/>
                 <a:cs typeface="Outfit" pitchFamily="34" charset="-120"/>
               </a:rPr>
-              <a:t>6.AT.3</a:t>
+              <a:t>6.AT.3c</a:t>
             </a:r>
             <a:endParaRPr lang="en-US" sz="900" dirty="0"/>
           </a:p>
@@ -12932,7 +13026,7 @@
                 <a:ea typeface="Hanken Grotesk" pitchFamily="34" charset="-122"/>
                 <a:cs typeface="Hanken Grotesk" pitchFamily="34" charset="-120"/>
               </a:rPr>
-              <a:t>I can solve real-world rate problems by finding and using unit rates.</a:t>
+              <a:t>I can use ratio reasoning to convert measurements between the customary and metric systems.</a:t>
             </a:r>
             <a:endParaRPr lang="en-US" sz="1800" dirty="0"/>
           </a:p>
@@ -13104,7 +13198,7 @@
                 <a:ea typeface="Hanken Grotesk" pitchFamily="34" charset="-122"/>
                 <a:cs typeface="Hanken Grotesk" pitchFamily="34" charset="-120"/>
               </a:rPr>
-              <a:t>I can explain my solution using the words rate, unit rate, per, and proportion.</a:t>
+              <a:t>I can explain a conversion between systems using the words conversion factor, approximately, customary, and metric.</a:t>
             </a:r>
             <a:endParaRPr lang="en-US" sz="1700" dirty="0"/>
           </a:p>
@@ -13277,7 +13371,7 @@
                 <a:ea typeface="Outfit" pitchFamily="34" charset="-122"/>
                 <a:cs typeface="Outfit" pitchFamily="34" charset="-120"/>
               </a:rPr>
-              <a:t>6.AT.3</a:t>
+              <a:t>6.AT.3c</a:t>
             </a:r>
             <a:endParaRPr lang="en-US" sz="900" dirty="0"/>
           </a:p>
@@ -13693,7 +13787,7 @@
                 <a:ea typeface="Hanken Grotesk" pitchFamily="34" charset="-122"/>
                 <a:cs typeface="Hanken Grotesk" pitchFamily="34" charset="-120"/>
               </a:rPr>
-              <a:t>Team 1 knows 3 pounds of chicken cost $18. What was your plan to find the cost of just 1 pound, and why is that unit rate useful?</a:t>
+              <a:t>A 5-kilometer race and a 5-mile race have the same number — 5. Before converting anything: which race is longer, and how do you know?</a:t>
             </a:r>
             <a:endParaRPr lang="en-US" sz="1400" dirty="0"/>
           </a:p>
@@ -14023,7 +14117,7 @@
                 <a:ea typeface="Hanken Grotesk" pitchFamily="34" charset="-122"/>
                 <a:cs typeface="Hanken Grotesk" pitchFamily="34" charset="-120"/>
               </a:rPr>
-              <a:t>rate</a:t>
+              <a:t>kilometer</a:t>
             </a:r>
             <a:endParaRPr lang="en-US" sz="900" dirty="0"/>
           </a:p>
@@ -14070,7 +14164,7 @@
                 <a:ea typeface="Hanken Grotesk" pitchFamily="34" charset="-122"/>
                 <a:cs typeface="Hanken Grotesk" pitchFamily="34" charset="-120"/>
               </a:rPr>
-              <a:t>unit rate</a:t>
+              <a:t>mile</a:t>
             </a:r>
             <a:endParaRPr lang="en-US" sz="900" dirty="0"/>
           </a:p>
@@ -14117,7 +14211,7 @@
                 <a:ea typeface="Hanken Grotesk" pitchFamily="34" charset="-122"/>
                 <a:cs typeface="Hanken Grotesk" pitchFamily="34" charset="-120"/>
               </a:rPr>
-              <a:t>per</a:t>
+              <a:t>unit</a:t>
             </a:r>
             <a:endParaRPr lang="en-US" sz="900" dirty="0"/>
           </a:p>
@@ -14164,54 +14258,7 @@
                 <a:ea typeface="Hanken Grotesk" pitchFamily="34" charset="-122"/>
                 <a:cs typeface="Hanken Grotesk" pitchFamily="34" charset="-120"/>
               </a:rPr>
-              <a:t>proportion</a:t>
-            </a:r>
-            <a:endParaRPr lang="en-US" sz="900" dirty="0"/>
-          </a:p>
-        </p:txBody>
-      </p:sp>
-      <p:sp>
-        <p:nvSpPr>
-          <p:cNvPr id="32" name="Text 30"/>
-          <p:cNvSpPr/>
-          <p:nvPr/>
-        </p:nvSpPr>
-        <p:spPr>
-          <a:xfrm>
-            <a:off x="6263640" y="3666744"/>
-            <a:ext cx="1120140" cy="329184"/>
-          </a:xfrm>
-          <a:prstGeom prst="roundRect">
-            <a:avLst>
-              <a:gd name="adj" fmla="val 13889"/>
-            </a:avLst>
-          </a:prstGeom>
-          <a:solidFill>
-            <a:srgbClr val="FFFFFF"/>
-          </a:solidFill>
-          <a:ln w="12700">
-            <a:solidFill>
-              <a:srgbClr val="D6DBDF"/>
-            </a:solidFill>
-          </a:ln>
-        </p:spPr>
-        <p:txBody>
-          <a:bodyPr wrap="square" rtlCol="0" anchor="ctr"/>
-          <a:lstStyle/>
-          <a:p>
-            <a:pPr algn="ctr" indent="0" marL="0">
-              <a:buNone/>
-            </a:pPr>
-            <a:r>
-              <a:rPr lang="en-US" sz="900" b="1" dirty="0">
-                <a:solidFill>
-                  <a:srgbClr val="17324D"/>
-                </a:solidFill>
-                <a:latin typeface="Hanken Grotesk" pitchFamily="34" charset="0"/>
-                <a:ea typeface="Hanken Grotesk" pitchFamily="34" charset="-122"/>
-                <a:cs typeface="Hanken Grotesk" pitchFamily="34" charset="-120"/>
-              </a:rPr>
-              <a:t>divide</a:t>
+              <a:t>convert</a:t>
             </a:r>
             <a:endParaRPr lang="en-US" sz="900" dirty="0"/>
           </a:p>
@@ -14384,7 +14431,7 @@
                 <a:ea typeface="Outfit" pitchFamily="34" charset="-122"/>
                 <a:cs typeface="Outfit" pitchFamily="34" charset="-120"/>
               </a:rPr>
-              <a:t>6.AT.3</a:t>
+              <a:t>6.AT.3c</a:t>
             </a:r>
             <a:endParaRPr lang="en-US" sz="900" dirty="0"/>
           </a:p>
@@ -14800,7 +14847,7 @@
                 <a:ea typeface="Hanken Grotesk" pitchFamily="34" charset="-122"/>
                 <a:cs typeface="Hanken Grotesk" pitchFamily="34" charset="-120"/>
               </a:rPr>
-              <a:t>Team 2 frosts 5 cupcakes every 4 minutes. How did you set up a rate or proportion to find how many cupcakes they frost in a longer time?</a:t>
+              <a:t>To convert between systems you used a conversion factor like 1 km ≈ 0.6 mi as a RATIO. How does writing it as the ratio 1 : 0.6 let a table do the converting for you?</a:t>
             </a:r>
             <a:endParaRPr lang="en-US" sz="1400" dirty="0"/>
           </a:p>
@@ -15130,7 +15177,7 @@
                 <a:ea typeface="Hanken Grotesk" pitchFamily="34" charset="-122"/>
                 <a:cs typeface="Hanken Grotesk" pitchFamily="34" charset="-120"/>
               </a:rPr>
-              <a:t>rate</a:t>
+              <a:t>conversion factor</a:t>
             </a:r>
             <a:endParaRPr lang="en-US" sz="900" dirty="0"/>
           </a:p>
@@ -15177,7 +15224,7 @@
                 <a:ea typeface="Hanken Grotesk" pitchFamily="34" charset="-122"/>
                 <a:cs typeface="Hanken Grotesk" pitchFamily="34" charset="-120"/>
               </a:rPr>
-              <a:t>unit rate</a:t>
+              <a:t>ratio</a:t>
             </a:r>
             <a:endParaRPr lang="en-US" sz="900" dirty="0"/>
           </a:p>
@@ -15224,7 +15271,7 @@
                 <a:ea typeface="Hanken Grotesk" pitchFamily="34" charset="-122"/>
                 <a:cs typeface="Hanken Grotesk" pitchFamily="34" charset="-120"/>
               </a:rPr>
-              <a:t>per</a:t>
+              <a:t>equivalent</a:t>
             </a:r>
             <a:endParaRPr lang="en-US" sz="900" dirty="0"/>
           </a:p>
@@ -15239,53 +15286,6 @@
         <p:spPr>
           <a:xfrm>
             <a:off x="7520940" y="3227832"/>
-            <a:ext cx="1120140" cy="329184"/>
-          </a:xfrm>
-          <a:prstGeom prst="roundRect">
-            <a:avLst>
-              <a:gd name="adj" fmla="val 13889"/>
-            </a:avLst>
-          </a:prstGeom>
-          <a:solidFill>
-            <a:srgbClr val="FFFFFF"/>
-          </a:solidFill>
-          <a:ln w="12700">
-            <a:solidFill>
-              <a:srgbClr val="D6DBDF"/>
-            </a:solidFill>
-          </a:ln>
-        </p:spPr>
-        <p:txBody>
-          <a:bodyPr wrap="square" rtlCol="0" anchor="ctr"/>
-          <a:lstStyle/>
-          <a:p>
-            <a:pPr algn="ctr" indent="0" marL="0">
-              <a:buNone/>
-            </a:pPr>
-            <a:r>
-              <a:rPr lang="en-US" sz="900" b="1" dirty="0">
-                <a:solidFill>
-                  <a:srgbClr val="17324D"/>
-                </a:solidFill>
-                <a:latin typeface="Hanken Grotesk" pitchFamily="34" charset="0"/>
-                <a:ea typeface="Hanken Grotesk" pitchFamily="34" charset="-122"/>
-                <a:cs typeface="Hanken Grotesk" pitchFamily="34" charset="-120"/>
-              </a:rPr>
-              <a:t>proportion</a:t>
-            </a:r>
-            <a:endParaRPr lang="en-US" sz="900" dirty="0"/>
-          </a:p>
-        </p:txBody>
-      </p:sp>
-      <p:sp>
-        <p:nvSpPr>
-          <p:cNvPr id="32" name="Text 30"/>
-          <p:cNvSpPr/>
-          <p:nvPr/>
-        </p:nvSpPr>
-        <p:spPr>
-          <a:xfrm>
-            <a:off x="6263640" y="3666744"/>
             <a:ext cx="1120140" cy="329184"/>
           </a:xfrm>
           <a:prstGeom prst="roundRect">
@@ -15491,7 +15491,7 @@
                 <a:ea typeface="Outfit" pitchFamily="34" charset="-122"/>
                 <a:cs typeface="Outfit" pitchFamily="34" charset="-120"/>
               </a:rPr>
-              <a:t>6.AT.3</a:t>
+              <a:t>6.AT.3c</a:t>
             </a:r>
             <a:endParaRPr lang="en-US" sz="900" dirty="0"/>
           </a:p>
@@ -15907,7 +15907,7 @@
                 <a:ea typeface="Hanken Grotesk" pitchFamily="34" charset="-122"/>
                 <a:cs typeface="Hanken Grotesk" pitchFamily="34" charset="-120"/>
               </a:rPr>
-              <a:t>Tell about a real situation where rates matter, like speed, pay, or price, and explain how the unit rate helps you.</a:t>
+              <a:t>Evelyn sees a 100 km/h speed sign in Canada, and at home her highway limit is 65 mi/h. One partner should convert with the table, the other with 100 × 0.6. Is 100 km/h faster or slower than her usual 65 mi/h?</a:t>
             </a:r>
             <a:endParaRPr lang="en-US" sz="1400" dirty="0"/>
           </a:p>
@@ -16237,7 +16237,7 @@
                 <a:ea typeface="Hanken Grotesk" pitchFamily="34" charset="-122"/>
                 <a:cs typeface="Hanken Grotesk" pitchFamily="34" charset="-120"/>
               </a:rPr>
-              <a:t>rate</a:t>
+              <a:t>kilometer</a:t>
             </a:r>
             <a:endParaRPr lang="en-US" sz="900" dirty="0"/>
           </a:p>
@@ -16284,7 +16284,7 @@
                 <a:ea typeface="Hanken Grotesk" pitchFamily="34" charset="-122"/>
                 <a:cs typeface="Hanken Grotesk" pitchFamily="34" charset="-120"/>
               </a:rPr>
-              <a:t>unit rate</a:t>
+              <a:t>mile</a:t>
             </a:r>
             <a:endParaRPr lang="en-US" sz="900" dirty="0"/>
           </a:p>
@@ -16331,7 +16331,7 @@
                 <a:ea typeface="Hanken Grotesk" pitchFamily="34" charset="-122"/>
                 <a:cs typeface="Hanken Grotesk" pitchFamily="34" charset="-120"/>
               </a:rPr>
-              <a:t>per</a:t>
+              <a:t>convert</a:t>
             </a:r>
             <a:endParaRPr lang="en-US" sz="900" dirty="0"/>
           </a:p>
@@ -16378,54 +16378,7 @@
                 <a:ea typeface="Hanken Grotesk" pitchFamily="34" charset="-122"/>
                 <a:cs typeface="Hanken Grotesk" pitchFamily="34" charset="-120"/>
               </a:rPr>
-              <a:t>proportion</a:t>
-            </a:r>
-            <a:endParaRPr lang="en-US" sz="900" dirty="0"/>
-          </a:p>
-        </p:txBody>
-      </p:sp>
-      <p:sp>
-        <p:nvSpPr>
-          <p:cNvPr id="32" name="Text 30"/>
-          <p:cNvSpPr/>
-          <p:nvPr/>
-        </p:nvSpPr>
-        <p:spPr>
-          <a:xfrm>
-            <a:off x="6263640" y="3666744"/>
-            <a:ext cx="1120140" cy="329184"/>
-          </a:xfrm>
-          <a:prstGeom prst="roundRect">
-            <a:avLst>
-              <a:gd name="adj" fmla="val 13889"/>
-            </a:avLst>
-          </a:prstGeom>
-          <a:solidFill>
-            <a:srgbClr val="FFFFFF"/>
-          </a:solidFill>
-          <a:ln w="12700">
-            <a:solidFill>
-              <a:srgbClr val="D6DBDF"/>
-            </a:solidFill>
-          </a:ln>
-        </p:spPr>
-        <p:txBody>
-          <a:bodyPr wrap="square" rtlCol="0" anchor="ctr"/>
-          <a:lstStyle/>
-          <a:p>
-            <a:pPr algn="ctr" indent="0" marL="0">
-              <a:buNone/>
-            </a:pPr>
-            <a:r>
-              <a:rPr lang="en-US" sz="900" b="1" dirty="0">
-                <a:solidFill>
-                  <a:srgbClr val="17324D"/>
-                </a:solidFill>
-                <a:latin typeface="Hanken Grotesk" pitchFamily="34" charset="0"/>
-                <a:ea typeface="Hanken Grotesk" pitchFamily="34" charset="-122"/>
-                <a:cs typeface="Hanken Grotesk" pitchFamily="34" charset="-120"/>
-              </a:rPr>
-              <a:t>compare</a:t>
+              <a:t>unit rate</a:t>
             </a:r>
             <a:endParaRPr lang="en-US" sz="900" dirty="0"/>
           </a:p>
@@ -16598,7 +16551,7 @@
                 <a:ea typeface="Outfit" pitchFamily="34" charset="-122"/>
                 <a:cs typeface="Outfit" pitchFamily="34" charset="-120"/>
               </a:rPr>
-              <a:t>6.AT.3</a:t>
+              <a:t>6.AT.3c</a:t>
             </a:r>
             <a:endParaRPr lang="en-US" sz="900" dirty="0"/>
           </a:p>
@@ -17014,7 +16967,7 @@
                 <a:ea typeface="Hanken Grotesk" pitchFamily="34" charset="-122"/>
                 <a:cs typeface="Hanken Grotesk" pitchFamily="34" charset="-120"/>
               </a:rPr>
-              <a:t>During practice on Ratio and Rate Problem Solving, what strategy did you use when a problem felt tricky?</a:t>
+              <a:t>During practice converting between systems, how did you decide whether the converted number should come out BIGGER or SMALLER than the number you started with?</a:t>
             </a:r>
             <a:endParaRPr lang="en-US" sz="1400" dirty="0"/>
           </a:p>
@@ -17344,7 +17297,7 @@
                 <a:ea typeface="Hanken Grotesk" pitchFamily="34" charset="-122"/>
                 <a:cs typeface="Hanken Grotesk" pitchFamily="34" charset="-120"/>
               </a:rPr>
-              <a:t>Rate</a:t>
+              <a:t>convert</a:t>
             </a:r>
             <a:endParaRPr lang="en-US" sz="900" dirty="0"/>
           </a:p>
@@ -17391,7 +17344,7 @@
                 <a:ea typeface="Hanken Grotesk" pitchFamily="34" charset="-122"/>
                 <a:cs typeface="Hanken Grotesk" pitchFamily="34" charset="-120"/>
               </a:rPr>
-              <a:t>Unit rate</a:t>
+              <a:t>unit</a:t>
             </a:r>
             <a:endParaRPr lang="en-US" sz="900" dirty="0"/>
           </a:p>
@@ -17438,7 +17391,7 @@
                 <a:ea typeface="Hanken Grotesk" pitchFamily="34" charset="-122"/>
                 <a:cs typeface="Hanken Grotesk" pitchFamily="34" charset="-120"/>
               </a:rPr>
-              <a:t>Per</a:t>
+              <a:t>larger</a:t>
             </a:r>
             <a:endParaRPr lang="en-US" sz="900" dirty="0"/>
           </a:p>
@@ -17485,7 +17438,7 @@
                 <a:ea typeface="Hanken Grotesk" pitchFamily="34" charset="-122"/>
                 <a:cs typeface="Hanken Grotesk" pitchFamily="34" charset="-120"/>
               </a:rPr>
-              <a:t>Problem solving</a:t>
+              <a:t>smaller</a:t>
             </a:r>
             <a:endParaRPr lang="en-US" sz="900" dirty="0"/>
           </a:p>
@@ -17658,7 +17611,7 @@
                 <a:ea typeface="Outfit" pitchFamily="34" charset="-122"/>
                 <a:cs typeface="Outfit" pitchFamily="34" charset="-120"/>
               </a:rPr>
-              <a:t>6.AT.3</a:t>
+              <a:t>6.AT.3c</a:t>
             </a:r>
             <a:endParaRPr lang="en-US" sz="900" dirty="0"/>
           </a:p>
@@ -18032,7 +17985,7 @@
                 <a:ea typeface="Outfit" pitchFamily="34" charset="-122"/>
                 <a:cs typeface="Outfit" pitchFamily="34" charset="-120"/>
               </a:rPr>
-              <a:t>Scenario</a:t>
+              <a:t>Border-Crossing Converter</a:t>
             </a:r>
             <a:endParaRPr lang="en-US" sz="1100" dirty="0"/>
           </a:p>
@@ -18071,7 +18024,7 @@
                 <a:ea typeface="Hanken Grotesk" pitchFamily="34" charset="-122"/>
                 <a:cs typeface="Hanken Grotesk" pitchFamily="34" charset="-120"/>
               </a:rPr>
-              <a:t>It's the final day of Chef Academy — the Culinary Competition! Teams must solve ratio and rate problems to earn ingredients for their dishes. Team 1 needs to figure out how much chicken costs if 3 pounds cost $18. Team 2 must calculate how many cupcakes they can frost if they decorate 5 cupcakes every 4 minutes. The clock is ticking!</a:t>
+              <a:t>The academy's kitchen orders from suppliers in two different countries. One ships in pounds and quarts, the other in kilograms and liters. Compare measurements by converting with the appropriate factor. Some factors are exact; rounded factors give approximate results. One supplier ships 10 pounds of rice and the other ships 5 kilograms. Use 1 pound ≈ 0.45 kilogram to find which shipment is more.</a:t>
             </a:r>
             <a:endParaRPr lang="en-US" sz="1150" dirty="0"/>
           </a:p>
@@ -18296,7 +18249,7 @@
                 <a:ea typeface="Hanken Grotesk" pitchFamily="34" charset="-122"/>
                 <a:cs typeface="Hanken Grotesk" pitchFamily="34" charset="-120"/>
               </a:rPr>
-              <a:t>•  What two quantities with different units are being compared?</a:t>
+              <a:t>•  I notice one measurement uses a ___ unit and the other uses a ___ unit.</a:t>
             </a:r>
             <a:endParaRPr lang="en-US" sz="1000" dirty="0"/>
           </a:p>
@@ -18316,7 +18269,7 @@
                 <a:ea typeface="Hanken Grotesk" pitchFamily="34" charset="-122"/>
                 <a:cs typeface="Hanken Grotesk" pitchFamily="34" charset="-120"/>
               </a:rPr>
-              <a:t>•  How could you find the cost of just 1 pound of chicken?</a:t>
+              <a:t>•  I notice the two numbers cannot be compared until they share a ___.</a:t>
             </a:r>
             <a:endParaRPr lang="en-US" sz="1000" dirty="0"/>
           </a:p>
@@ -18336,7 +18289,7 @@
                 <a:ea typeface="Hanken Grotesk" pitchFamily="34" charset="-122"/>
                 <a:cs typeface="Hanken Grotesk" pitchFamily="34" charset="-120"/>
               </a:rPr>
-              <a:t>•  How could you find the number of cupcakes frosted in 1 minute?</a:t>
+              <a:t>•  I notice the conversion factor uses the ≈ sign because it is ___.</a:t>
             </a:r>
             <a:endParaRPr lang="en-US" sz="1000" dirty="0"/>
           </a:p>
@@ -18453,7 +18406,7 @@
                 <a:ea typeface="Hanken Grotesk" pitchFamily="34" charset="-122"/>
                 <a:cs typeface="Hanken Grotesk" pitchFamily="34" charset="-120"/>
               </a:rPr>
-              <a:t>•  Which strategy is fastest — unit rates, ratio tables, or proportions?</a:t>
+              <a:t>•  I wonder which amount is actually bigger once I ___ them.</a:t>
             </a:r>
             <a:endParaRPr lang="en-US" sz="1000" dirty="0"/>
           </a:p>
@@ -18473,7 +18426,7 @@
                 <a:ea typeface="Hanken Grotesk" pitchFamily="34" charset="-122"/>
                 <a:cs typeface="Hanken Grotesk" pitchFamily="34" charset="-120"/>
               </a:rPr>
-              <a:t>•  What if the rate is not a whole number — can you still solve the problem?</a:t>
+              <a:t>•  I wonder why conversions between systems are only ___.</a:t>
             </a:r>
             <a:endParaRPr lang="en-US" sz="1000" dirty="0"/>
           </a:p>
@@ -18646,7 +18599,7 @@
                 <a:ea typeface="Outfit" pitchFamily="34" charset="-122"/>
                 <a:cs typeface="Outfit" pitchFamily="34" charset="-120"/>
               </a:rPr>
-              <a:t>6.AT.3</a:t>
+              <a:t>6.AT.3c</a:t>
             </a:r>
             <a:endParaRPr lang="en-US" sz="900" dirty="0"/>
           </a:p>
@@ -19161,7 +19114,7 @@
                           <a:ea typeface="Hanken Grotesk" pitchFamily="34" charset="-122"/>
                           <a:cs typeface="Hanken Grotesk" pitchFamily="34" charset="-120"/>
                         </a:rPr>
-                        <a:t>Rate</a:t>
+                        <a:t>Convert Measurements Between Systems</a:t>
                       </a:r>
                       <a:pPr indent="0" marL="0">
                         <a:buNone/>
@@ -19185,7 +19138,7 @@
                           <a:ea typeface="Hanken Grotesk" pitchFamily="34" charset="-122"/>
                           <a:cs typeface="Hanken Grotesk" pitchFamily="34" charset="-120"/>
                         </a:rPr>
-                        <a:t>Tasa</a:t>
+                        <a:t>Convertir medidas entre sistemas</a:t>
                       </a:r>
                       <a:endParaRPr lang="en-US" sz="950" dirty="0">
                         <a:latin typeface="Hanken Grotesk" charset="0"/>
@@ -19253,7 +19206,7 @@
                           <a:ea typeface="Hanken Grotesk" pitchFamily="34" charset="-122"/>
                           <a:cs typeface="Hanken Grotesk" pitchFamily="34" charset="-120"/>
                         </a:rPr>
-                        <a:t>A ratio comparing two amounts with different units, like miles per hour.</a:t>
+                        <a:t>Rewriting a customary measurement as a metric one, or the reverse, so two amounts can be compared.</a:t>
                       </a:r>
                       <a:pPr indent="0" marL="0">
                         <a:buNone/>
@@ -19277,7 +19230,7 @@
                           <a:ea typeface="Hanken Grotesk" pitchFamily="34" charset="-122"/>
                           <a:cs typeface="Hanken Grotesk" pitchFamily="34" charset="-120"/>
                         </a:rPr>
-                        <a:t>Una razón que compara dos cantidades con unidades distintas, como millas por hora.</a:t>
+                        <a:t>Reescribir una medida usual como métrica, o al revés, para poder comparar dos cantidades.</a:t>
                       </a:r>
                       <a:endParaRPr lang="en-US" sz="900" dirty="0">
                         <a:latin typeface="Hanken Grotesk" charset="0"/>
@@ -19345,7 +19298,7 @@
                           <a:ea typeface="Hanken Grotesk" pitchFamily="34" charset="-122"/>
                           <a:cs typeface="Hanken Grotesk" pitchFamily="34" charset="-120"/>
                         </a:rPr>
-                        <a:t>$12 for 4 pounds → dollars per pound</a:t>
+                        <a:t>100 kilometers ≈ 60 miles</a:t>
                       </a:r>
                       <a:endParaRPr lang="en-US" sz="900" dirty="0">
                         <a:latin typeface="Hanken Grotesk" charset="0"/>
@@ -19415,7 +19368,7 @@
                           <a:ea typeface="Hanken Grotesk" pitchFamily="34" charset="-122"/>
                           <a:cs typeface="Hanken Grotesk" pitchFamily="34" charset="-120"/>
                         </a:rPr>
-                        <a:t>Unit rate</a:t>
+                        <a:t>Conversion factor</a:t>
                       </a:r>
                       <a:pPr indent="0" marL="0">
                         <a:buNone/>
@@ -19439,7 +19392,7 @@
                           <a:ea typeface="Hanken Grotesk" pitchFamily="34" charset="-122"/>
                           <a:cs typeface="Hanken Grotesk" pitchFamily="34" charset="-120"/>
                         </a:rPr>
-                        <a:t>Tasa unitaria</a:t>
+                        <a:t>Factor de conversión</a:t>
                       </a:r>
                       <a:endParaRPr lang="en-US" sz="950" dirty="0">
                         <a:latin typeface="Hanken Grotesk" charset="0"/>
@@ -19507,7 +19460,7 @@
                           <a:ea typeface="Hanken Grotesk" pitchFamily="34" charset="-122"/>
                           <a:cs typeface="Hanken Grotesk" pitchFamily="34" charset="-120"/>
                         </a:rPr>
-                        <a:t>A rate for just 1 of something, like cost for 1 item.</a:t>
+                        <a:t>The ratio that links a unit in one system to a unit in the other, such as 1 mile to about 1.609 kilometers.</a:t>
                       </a:r>
                       <a:pPr indent="0" marL="0">
                         <a:buNone/>
@@ -19531,7 +19484,7 @@
                           <a:ea typeface="Hanken Grotesk" pitchFamily="34" charset="-122"/>
                           <a:cs typeface="Hanken Grotesk" pitchFamily="34" charset="-120"/>
                         </a:rPr>
-                        <a:t>Una tasa para solo 1 de algo, como el precio de 1 artículo.</a:t>
+                        <a:t>La razón que relaciona una unidad de un sistema con una del otro, como 1 milla a unos 1.609 kilómetros.</a:t>
                       </a:r>
                       <a:endParaRPr lang="en-US" sz="900" dirty="0">
                         <a:latin typeface="Hanken Grotesk" charset="0"/>
@@ -19599,7 +19552,7 @@
                           <a:ea typeface="Hanken Grotesk" pitchFamily="34" charset="-122"/>
                           <a:cs typeface="Hanken Grotesk" pitchFamily="34" charset="-120"/>
                         </a:rPr>
-                        <a:t>$12 ÷ 4 = $3 per 1 pound</a:t>
+                        <a:t>1 lb ≈ 0.45 kg · 1 in = 2.54 cm</a:t>
                       </a:r>
                       <a:endParaRPr lang="en-US" sz="900" dirty="0">
                         <a:latin typeface="Hanken Grotesk" charset="0"/>
@@ -19669,7 +19622,7 @@
                           <a:ea typeface="Hanken Grotesk" pitchFamily="34" charset="-122"/>
                           <a:cs typeface="Hanken Grotesk" pitchFamily="34" charset="-120"/>
                         </a:rPr>
-                        <a:t>Per</a:t>
+                        <a:t>Customary system</a:t>
                       </a:r>
                       <a:pPr indent="0" marL="0">
                         <a:buNone/>
@@ -19693,7 +19646,7 @@
                           <a:ea typeface="Hanken Grotesk" pitchFamily="34" charset="-122"/>
                           <a:cs typeface="Hanken Grotesk" pitchFamily="34" charset="-120"/>
                         </a:rPr>
-                        <a:t>Por</a:t>
+                        <a:t>Sistema usual</a:t>
                       </a:r>
                       <a:endParaRPr lang="en-US" sz="950" dirty="0">
                         <a:latin typeface="Hanken Grotesk" charset="0"/>
@@ -19761,7 +19714,7 @@
                           <a:ea typeface="Hanken Grotesk" pitchFamily="34" charset="-122"/>
                           <a:cs typeface="Hanken Grotesk" pitchFamily="34" charset="-120"/>
                         </a:rPr>
-                        <a:t>For each one. Example: 5 dollars per book.</a:t>
+                        <a:t>The measurement system used in the United States: inches, feet, miles, ounces, pounds, cups, quarts, gallons.</a:t>
                       </a:r>
                       <a:pPr indent="0" marL="0">
                         <a:buNone/>
@@ -19785,7 +19738,7 @@
                           <a:ea typeface="Hanken Grotesk" pitchFamily="34" charset="-122"/>
                           <a:cs typeface="Hanken Grotesk" pitchFamily="34" charset="-120"/>
                         </a:rPr>
-                        <a:t>Por cada uno. Ejemplo: 5 dólares por libro.</a:t>
+                        <a:t>El sistema de medidas que se usa en Estados Unidos: pulgadas, pies, millas, onzas, libras, tazas, cuartos y galones.</a:t>
                       </a:r>
                       <a:endParaRPr lang="en-US" sz="900" dirty="0">
                         <a:latin typeface="Hanken Grotesk" charset="0"/>
@@ -19853,7 +19806,7 @@
                           <a:ea typeface="Hanken Grotesk" pitchFamily="34" charset="-122"/>
                           <a:cs typeface="Hanken Grotesk" pitchFamily="34" charset="-120"/>
                         </a:rPr>
-                        <a:t>60 miles per hour, $5 per ticket</a:t>
+                        <a:t>in · ft · mi · oz · lb · qt · gal</a:t>
                       </a:r>
                       <a:endParaRPr lang="en-US" sz="900" dirty="0">
                         <a:latin typeface="Hanken Grotesk" charset="0"/>
@@ -19923,7 +19876,7 @@
                           <a:ea typeface="Hanken Grotesk" pitchFamily="34" charset="-122"/>
                           <a:cs typeface="Hanken Grotesk" pitchFamily="34" charset="-120"/>
                         </a:rPr>
-                        <a:t>Problem solving</a:t>
+                        <a:t>Metric system</a:t>
                       </a:r>
                       <a:pPr indent="0" marL="0">
                         <a:buNone/>
@@ -19947,7 +19900,7 @@
                           <a:ea typeface="Hanken Grotesk" pitchFamily="34" charset="-122"/>
                           <a:cs typeface="Hanken Grotesk" pitchFamily="34" charset="-120"/>
                         </a:rPr>
-                        <a:t>Resolución de problemas</a:t>
+                        <a:t>Sistema métrico</a:t>
                       </a:r>
                       <a:endParaRPr lang="en-US" sz="950" dirty="0">
                         <a:latin typeface="Hanken Grotesk" charset="0"/>
@@ -20015,7 +19968,7 @@
                           <a:ea typeface="Hanken Grotesk" pitchFamily="34" charset="-122"/>
                           <a:cs typeface="Hanken Grotesk" pitchFamily="34" charset="-120"/>
                         </a:rPr>
-                        <a:t>Using ratios and rates to find a missing amount.</a:t>
+                        <a:t>The measurement system used in most of the world, built on tens: centimeters, meters, kilometers, grams, kilograms, liters.</a:t>
                       </a:r>
                       <a:pPr indent="0" marL="0">
                         <a:buNone/>
@@ -20039,7 +19992,7 @@
                           <a:ea typeface="Hanken Grotesk" pitchFamily="34" charset="-122"/>
                           <a:cs typeface="Hanken Grotesk" pitchFamily="34" charset="-120"/>
                         </a:rPr>
-                        <a:t>Usar razones y tasas para encontrar una cantidad que falta.</a:t>
+                        <a:t>El sistema de medidas que se usa en casi todo el mundo, basado en decenas: centímetros, metros, kilómetros, gramos, kilogramos y litros.</a:t>
                       </a:r>
                       <a:endParaRPr lang="en-US" sz="900" dirty="0">
                         <a:latin typeface="Hanken Grotesk" charset="0"/>
@@ -20107,7 +20060,7 @@
                           <a:ea typeface="Hanken Grotesk" pitchFamily="34" charset="-122"/>
                           <a:cs typeface="Hanken Grotesk" pitchFamily="34" charset="-120"/>
                         </a:rPr>
-                        <a:t>Set up → Plan → Solve → Check</a:t>
+                        <a:t>cm · m · km · g · kg · mL · L</a:t>
                       </a:r>
                       <a:endParaRPr lang="en-US" sz="900" dirty="0">
                         <a:latin typeface="Hanken Grotesk" charset="0"/>
@@ -20177,7 +20130,7 @@
                           <a:ea typeface="Hanken Grotesk" pitchFamily="34" charset="-122"/>
                           <a:cs typeface="Hanken Grotesk" pitchFamily="34" charset="-120"/>
                         </a:rPr>
-                        <a:t>Proportion</a:t>
+                        <a:t>Approximately</a:t>
                       </a:r>
                       <a:pPr indent="0" marL="0">
                         <a:buNone/>
@@ -20201,7 +20154,7 @@
                           <a:ea typeface="Hanken Grotesk" pitchFamily="34" charset="-122"/>
                           <a:cs typeface="Hanken Grotesk" pitchFamily="34" charset="-120"/>
                         </a:rPr>
-                        <a:t>Proporción</a:t>
+                        <a:t>Aproximadamente</a:t>
                       </a:r>
                       <a:endParaRPr lang="en-US" sz="950" dirty="0">
                         <a:latin typeface="Hanken Grotesk" charset="0"/>
@@ -20269,7 +20222,7 @@
                           <a:ea typeface="Hanken Grotesk" pitchFamily="34" charset="-122"/>
                           <a:cs typeface="Hanken Grotesk" pitchFamily="34" charset="-120"/>
                         </a:rPr>
-                        <a:t>A math sentence saying two ratios are equal. It helps find a missing number.</a:t>
+                        <a:t>Close to, but not exactly equal. A rounded conversion factor gives an approximate result, written with ≈; an exact conversion uses =.</a:t>
                       </a:r>
                       <a:pPr indent="0" marL="0">
                         <a:buNone/>
@@ -20293,7 +20246,7 @@
                           <a:ea typeface="Hanken Grotesk" pitchFamily="34" charset="-122"/>
                           <a:cs typeface="Hanken Grotesk" pitchFamily="34" charset="-120"/>
                         </a:rPr>
-                        <a:t>Una oración matemática que dice que dos razones son iguales. Ayuda a hallar un número que falta.</a:t>
+                        <a:t>Cercano, pero no exactamente igual. Un factor de conversión redondeado da un resultado aproximado, escrito con ≈; una conversión exacta usa =.</a:t>
                       </a:r>
                       <a:endParaRPr lang="en-US" sz="900" dirty="0">
                         <a:latin typeface="Hanken Grotesk" charset="0"/>
@@ -20361,7 +20314,7 @@
                           <a:ea typeface="Hanken Grotesk" pitchFamily="34" charset="-122"/>
                           <a:cs typeface="Hanken Grotesk" pitchFamily="34" charset="-120"/>
                         </a:rPr>
-                        <a:t>3/5 = x/20 → x = 12</a:t>
+                        <a:t>1 km ≈ 0.6 mi, not exactly 0.6</a:t>
                       </a:r>
                       <a:endParaRPr lang="en-US" sz="900" dirty="0">
                         <a:latin typeface="Hanken Grotesk" charset="0"/>
@@ -20417,6 +20370,247 @@
           </a:graphicData>
         </a:graphic>
       </p:graphicFrame>
+      <p:sp>
+        <p:nvSpPr>
+          <p:cNvPr id="18" name="Text 15"/>
+          <p:cNvSpPr/>
+          <p:nvPr/>
+        </p:nvSpPr>
+        <p:spPr>
+          <a:xfrm>
+            <a:off x="411480" y="3520440"/>
+            <a:ext cx="8412480" cy="237744"/>
+          </a:xfrm>
+          <a:prstGeom prst="rect">
+            <a:avLst/>
+          </a:prstGeom>
+          <a:noFill/>
+          <a:ln/>
+        </p:spPr>
+        <p:txBody>
+          <a:bodyPr wrap="square" rtlCol="0" anchor="ctr"/>
+          <a:lstStyle/>
+          <a:p>
+            <a:pPr indent="0" marL="0">
+              <a:buNone/>
+            </a:pPr>
+            <a:r>
+              <a:rPr lang="en-US" sz="950" b="1" dirty="0">
+                <a:solidFill>
+                  <a:srgbClr val="17324D"/>
+                </a:solidFill>
+                <a:latin typeface="Outfit" pitchFamily="34" charset="0"/>
+                <a:ea typeface="Outfit" pitchFamily="34" charset="-122"/>
+                <a:cs typeface="Outfit" pitchFamily="34" charset="-120"/>
+              </a:rPr>
+              <a:t>Convert Measurements Between Systems — example vs. non-example:</a:t>
+            </a:r>
+            <a:endParaRPr lang="en-US" sz="950" dirty="0"/>
+          </a:p>
+        </p:txBody>
+      </p:sp>
+      <p:sp>
+        <p:nvSpPr>
+          <p:cNvPr id="19" name="Shape 16"/>
+          <p:cNvSpPr/>
+          <p:nvPr/>
+        </p:nvSpPr>
+        <p:spPr>
+          <a:xfrm>
+            <a:off x="411480" y="3813048"/>
+            <a:ext cx="4114800" cy="457200"/>
+          </a:xfrm>
+          <a:prstGeom prst="roundRect">
+            <a:avLst>
+              <a:gd name="adj" fmla="val 10000"/>
+            </a:avLst>
+          </a:prstGeom>
+          <a:solidFill>
+            <a:srgbClr val="E7F6F4"/>
+          </a:solidFill>
+          <a:ln w="12700">
+            <a:solidFill>
+              <a:srgbClr val="1FA6A2"/>
+            </a:solidFill>
+            <a:prstDash val="solid"/>
+          </a:ln>
+          <a:effectLst>
+            <a:outerShdw sx="100000" sy="100000" kx="0" ky="0" algn="bl" rotWithShape="0" blurRad="50800" dist="12700" dir="5400000">
+              <a:srgbClr val="1C2E42">
+                <a:alpha val="10000"/>
+              </a:srgbClr>
+            </a:outerShdw>
+          </a:effectLst>
+        </p:spPr>
+      </p:sp>
+      <p:sp>
+        <p:nvSpPr>
+          <p:cNvPr id="20" name="Text 17"/>
+          <p:cNvSpPr/>
+          <p:nvPr/>
+        </p:nvSpPr>
+        <p:spPr>
+          <a:xfrm>
+            <a:off x="521208" y="3813048"/>
+            <a:ext cx="3895344" cy="457200"/>
+          </a:xfrm>
+          <a:prstGeom prst="rect">
+            <a:avLst/>
+          </a:prstGeom>
+          <a:noFill/>
+          <a:ln/>
+        </p:spPr>
+        <p:txBody>
+          <a:bodyPr wrap="square" rtlCol="0" anchor="ctr"/>
+          <a:lstStyle/>
+          <a:p>
+            <a:pPr indent="0" marL="0">
+              <a:buNone/>
+            </a:pPr>
+            <a:r>
+              <a:rPr lang="en-US" sz="900" b="1" dirty="0">
+                <a:solidFill>
+                  <a:srgbClr val="1FA6A2"/>
+                </a:solidFill>
+                <a:latin typeface="Hanken Grotesk" pitchFamily="34" charset="0"/>
+                <a:ea typeface="Hanken Grotesk" pitchFamily="34" charset="-122"/>
+                <a:cs typeface="Hanken Grotesk" pitchFamily="34" charset="-120"/>
+              </a:rPr>
+              <a:t>✓ </a:t>
+            </a:r>
+            <a:pPr indent="0" marL="0">
+              <a:buNone/>
+            </a:pPr>
+            <a:r>
+              <a:rPr lang="en-US" sz="900" b="1" dirty="0">
+                <a:solidFill>
+                  <a:srgbClr val="17324D"/>
+                </a:solidFill>
+                <a:latin typeface="Hanken Grotesk" pitchFamily="34" charset="0"/>
+                <a:ea typeface="Hanken Grotesk" pitchFamily="34" charset="-122"/>
+                <a:cs typeface="Hanken Grotesk" pitchFamily="34" charset="-120"/>
+              </a:rPr>
+              <a:t>80 km ≈ 48 miles  </a:t>
+            </a:r>
+            <a:pPr indent="0" marL="0">
+              <a:buNone/>
+            </a:pPr>
+            <a:r>
+              <a:rPr lang="en-US" sz="800" dirty="0">
+                <a:solidFill>
+                  <a:srgbClr val="24323F"/>
+                </a:solidFill>
+                <a:latin typeface="Hanken Grotesk" pitchFamily="34" charset="0"/>
+                <a:ea typeface="Hanken Grotesk" pitchFamily="34" charset="-122"/>
+                <a:cs typeface="Hanken Grotesk" pitchFamily="34" charset="-120"/>
+              </a:rPr>
+              <a:t>These units belong to different systems; this particular factor is rounded.</a:t>
+            </a:r>
+            <a:endParaRPr lang="en-US" sz="900" dirty="0"/>
+          </a:p>
+        </p:txBody>
+      </p:sp>
+      <p:sp>
+        <p:nvSpPr>
+          <p:cNvPr id="21" name="Shape 18"/>
+          <p:cNvSpPr/>
+          <p:nvPr/>
+        </p:nvSpPr>
+        <p:spPr>
+          <a:xfrm>
+            <a:off x="4663440" y="3813048"/>
+            <a:ext cx="4114800" cy="457200"/>
+          </a:xfrm>
+          <a:prstGeom prst="roundRect">
+            <a:avLst>
+              <a:gd name="adj" fmla="val 10000"/>
+            </a:avLst>
+          </a:prstGeom>
+          <a:solidFill>
+            <a:srgbClr val="FDECEA"/>
+          </a:solidFill>
+          <a:ln w="12700">
+            <a:solidFill>
+              <a:srgbClr val="E2A39B"/>
+            </a:solidFill>
+            <a:prstDash val="solid"/>
+          </a:ln>
+          <a:effectLst>
+            <a:outerShdw sx="100000" sy="100000" kx="0" ky="0" algn="bl" rotWithShape="0" blurRad="50800" dist="12700" dir="5400000">
+              <a:srgbClr val="1C2E42">
+                <a:alpha val="10000"/>
+              </a:srgbClr>
+            </a:outerShdw>
+          </a:effectLst>
+        </p:spPr>
+      </p:sp>
+      <p:sp>
+        <p:nvSpPr>
+          <p:cNvPr id="22" name="Text 19"/>
+          <p:cNvSpPr/>
+          <p:nvPr/>
+        </p:nvSpPr>
+        <p:spPr>
+          <a:xfrm>
+            <a:off x="4773168" y="3813048"/>
+            <a:ext cx="3895344" cy="457200"/>
+          </a:xfrm>
+          <a:prstGeom prst="rect">
+            <a:avLst/>
+          </a:prstGeom>
+          <a:noFill/>
+          <a:ln/>
+        </p:spPr>
+        <p:txBody>
+          <a:bodyPr wrap="square" rtlCol="0" anchor="ctr"/>
+          <a:lstStyle/>
+          <a:p>
+            <a:pPr indent="0" marL="0">
+              <a:buNone/>
+            </a:pPr>
+            <a:r>
+              <a:rPr lang="en-US" sz="900" b="1" dirty="0">
+                <a:solidFill>
+                  <a:srgbClr val="C0392B"/>
+                </a:solidFill>
+                <a:latin typeface="Hanken Grotesk" pitchFamily="34" charset="0"/>
+                <a:ea typeface="Hanken Grotesk" pitchFamily="34" charset="-122"/>
+                <a:cs typeface="Hanken Grotesk" pitchFamily="34" charset="-120"/>
+              </a:rPr>
+              <a:t>✗ </a:t>
+            </a:r>
+            <a:pPr indent="0" marL="0">
+              <a:buNone/>
+            </a:pPr>
+            <a:r>
+              <a:rPr lang="en-US" sz="900" b="1" dirty="0">
+                <a:solidFill>
+                  <a:srgbClr val="17324D"/>
+                </a:solidFill>
+                <a:latin typeface="Hanken Grotesk" pitchFamily="34" charset="0"/>
+                <a:ea typeface="Hanken Grotesk" pitchFamily="34" charset="-122"/>
+                <a:cs typeface="Hanken Grotesk" pitchFamily="34" charset="-120"/>
+              </a:rPr>
+              <a:t>80 km = 48 miles exactly  </a:t>
+            </a:r>
+            <a:pPr indent="0" marL="0">
+              <a:buNone/>
+            </a:pPr>
+            <a:r>
+              <a:rPr lang="en-US" sz="800" dirty="0">
+                <a:solidFill>
+                  <a:srgbClr val="24323F"/>
+                </a:solidFill>
+                <a:latin typeface="Hanken Grotesk" pitchFamily="34" charset="0"/>
+                <a:ea typeface="Hanken Grotesk" pitchFamily="34" charset="-122"/>
+                <a:cs typeface="Hanken Grotesk" pitchFamily="34" charset="-120"/>
+              </a:rPr>
+              <a:t>The factor is rounded; = claims too much.</a:t>
+            </a:r>
+            <a:endParaRPr lang="en-US" sz="900" dirty="0"/>
+          </a:p>
+        </p:txBody>
+      </p:sp>
     </p:spTree>
   </p:cSld>
   <p:clrMapOvr>
@@ -20584,7 +20778,7 @@
                 <a:ea typeface="Outfit" pitchFamily="34" charset="-122"/>
                 <a:cs typeface="Outfit" pitchFamily="34" charset="-120"/>
               </a:rPr>
-              <a:t>6.AT.3</a:t>
+              <a:t>6.AT.3c</a:t>
             </a:r>
             <a:endParaRPr lang="en-US" sz="900" dirty="0"/>
           </a:p>
@@ -20958,7 +21152,7 @@
                 <a:ea typeface="Outfit" pitchFamily="34" charset="-122"/>
                 <a:cs typeface="Outfit" pitchFamily="34" charset="-120"/>
               </a:rPr>
-              <a:t>How do unit rates solve rate problems?</a:t>
+              <a:t>Comparing across two measurement systems</a:t>
             </a:r>
             <a:endParaRPr lang="en-US" sz="1200" dirty="0"/>
           </a:p>
@@ -21056,7 +21250,7 @@
                 <a:ea typeface="Hanken Grotesk" pitchFamily="34" charset="-122"/>
                 <a:cs typeface="Hanken Grotesk" pitchFamily="34" charset="-120"/>
               </a:rPr>
-              <a:t>A car drives 100 miles in 2 hours. What is the unit rate in miles per hour?</a:t>
+              <a:t>Terrance needs flea medicine for a dog weighing 31 pounds, but the packages are labeled in kilograms.</a:t>
             </a:r>
             <a:endParaRPr lang="en-US" sz="1050" dirty="0"/>
           </a:p>
@@ -21154,7 +21348,7 @@
                 <a:ea typeface="Hanken Grotesk" pitchFamily="34" charset="-122"/>
                 <a:cs typeface="Hanken Grotesk" pitchFamily="34" charset="-120"/>
               </a:rPr>
-              <a:t>Divide: 100 divided by 2 = 50 miles per hour.</a:t>
+              <a:t>The conversion factor is 1 pound ≈ 0.45 kilogram, so the ratio is 1 : 0.45.</a:t>
             </a:r>
             <a:endParaRPr lang="en-US" sz="1050" dirty="0"/>
           </a:p>
@@ -21252,7 +21446,7 @@
                 <a:ea typeface="Hanken Grotesk" pitchFamily="34" charset="-122"/>
                 <a:cs typeface="Hanken Grotesk" pitchFamily="34" charset="-120"/>
               </a:rPr>
-              <a:t>How far in 4 hours? Multiply: 50 x 4 = 200 miles.</a:t>
+              <a:t>Scale it with a ratio table: 10 lb ≈ 4.5 kg, 20 lb ≈ 9 kg, 30 lb ≈ 13.5 kg, 40 lb ≈ 18 kg.</a:t>
             </a:r>
             <a:endParaRPr lang="en-US" sz="1050" dirty="0"/>
           </a:p>
@@ -21260,14 +21454,73 @@
       </p:sp>
       <p:sp>
         <p:nvSpPr>
-          <p:cNvPr id="29" name="Text 27"/>
-          <p:cNvSpPr/>
-          <p:nvPr/>
-        </p:nvSpPr>
-        <p:spPr>
-          <a:xfrm>
-            <a:off x="594360" y="3886200"/>
-            <a:ext cx="5120640" cy="228600"/>
+          <p:cNvPr id="29" name="Shape 27"/>
+          <p:cNvSpPr/>
+          <p:nvPr/>
+        </p:nvSpPr>
+        <p:spPr>
+          <a:xfrm>
+            <a:off x="640080" y="3035808"/>
+            <a:ext cx="274320" cy="274320"/>
+          </a:xfrm>
+          <a:prstGeom prst="ellipse">
+            <a:avLst/>
+          </a:prstGeom>
+          <a:solidFill>
+            <a:srgbClr val="C0654A"/>
+          </a:solidFill>
+          <a:ln/>
+        </p:spPr>
+      </p:sp>
+      <p:sp>
+        <p:nvSpPr>
+          <p:cNvPr id="30" name="Text 28"/>
+          <p:cNvSpPr/>
+          <p:nvPr/>
+        </p:nvSpPr>
+        <p:spPr>
+          <a:xfrm>
+            <a:off x="640080" y="3035808"/>
+            <a:ext cx="274320" cy="274320"/>
+          </a:xfrm>
+          <a:prstGeom prst="rect">
+            <a:avLst/>
+          </a:prstGeom>
+          <a:noFill/>
+          <a:ln/>
+        </p:spPr>
+        <p:txBody>
+          <a:bodyPr wrap="square" rtlCol="0" anchor="ctr"/>
+          <a:lstStyle/>
+          <a:p>
+            <a:pPr algn="ctr" indent="0" marL="0">
+              <a:buNone/>
+            </a:pPr>
+            <a:r>
+              <a:rPr lang="en-US" sz="1100" b="1" dirty="0">
+                <a:solidFill>
+                  <a:srgbClr val="FFFFFF"/>
+                </a:solidFill>
+                <a:latin typeface="Outfit" pitchFamily="34" charset="0"/>
+                <a:ea typeface="Outfit" pitchFamily="34" charset="-122"/>
+                <a:cs typeface="Outfit" pitchFamily="34" charset="-120"/>
+              </a:rPr>
+              <a:t>4</a:t>
+            </a:r>
+            <a:endParaRPr lang="en-US" sz="1100" dirty="0"/>
+          </a:p>
+        </p:txBody>
+      </p:sp>
+      <p:sp>
+        <p:nvSpPr>
+          <p:cNvPr id="31" name="Text 29"/>
+          <p:cNvSpPr/>
+          <p:nvPr/>
+        </p:nvSpPr>
+        <p:spPr>
+          <a:xfrm>
+            <a:off x="1024128" y="2980944"/>
+            <a:ext cx="4828032" cy="420624"/>
           </a:xfrm>
           <a:prstGeom prst="rect">
             <a:avLst/>
@@ -21283,14 +21536,53 @@
               <a:buNone/>
             </a:pPr>
             <a:r>
-              <a:rPr lang="en-US" sz="900" i="1" dirty="0">
-                <a:solidFill>
-                  <a:srgbClr val="8A96A3"/>
+              <a:rPr lang="en-US" sz="1050" dirty="0">
+                <a:solidFill>
+                  <a:srgbClr val="24323F"/>
                 </a:solidFill>
                 <a:latin typeface="Hanken Grotesk" pitchFamily="34" charset="0"/>
                 <a:ea typeface="Hanken Grotesk" pitchFamily="34" charset="-122"/>
                 <a:cs typeface="Hanken Grotesk" pitchFamily="34" charset="-120"/>
               </a:rPr>
+              <a:t>31 pounds is just past 30, so the dog is a little more than 13.5 kilograms. That falls inside the package for dogs between 10 and 25 kilograms.</a:t>
+            </a:r>
+            <a:endParaRPr lang="en-US" sz="1050" dirty="0"/>
+          </a:p>
+        </p:txBody>
+      </p:sp>
+      <p:sp>
+        <p:nvSpPr>
+          <p:cNvPr id="32" name="Text 30"/>
+          <p:cNvSpPr/>
+          <p:nvPr/>
+        </p:nvSpPr>
+        <p:spPr>
+          <a:xfrm>
+            <a:off x="594360" y="3886200"/>
+            <a:ext cx="5120640" cy="228600"/>
+          </a:xfrm>
+          <a:prstGeom prst="rect">
+            <a:avLst/>
+          </a:prstGeom>
+          <a:noFill/>
+          <a:ln/>
+        </p:spPr>
+        <p:txBody>
+          <a:bodyPr wrap="square" rtlCol="0" anchor="ctr"/>
+          <a:lstStyle/>
+          <a:p>
+            <a:pPr indent="0" marL="0">
+              <a:buNone/>
+            </a:pPr>
+            <a:r>
+              <a:rPr lang="en-US" sz="900" i="1" dirty="0">
+                <a:solidFill>
+                  <a:srgbClr val="8A96A3"/>
+                </a:solidFill>
+                <a:latin typeface="Hanken Grotesk" pitchFamily="34" charset="0"/>
+                <a:ea typeface="Hanken Grotesk" pitchFamily="34" charset="-122"/>
+                <a:cs typeface="Hanken Grotesk" pitchFamily="34" charset="-120"/>
+              </a:rPr>
               <a:t>Your turn — show your work:</a:t>
             </a:r>
             <a:endParaRPr lang="en-US" sz="900" dirty="0"/>
@@ -21299,7 +21591,7 @@
       </p:sp>
       <p:sp>
         <p:nvSpPr>
-          <p:cNvPr id="30" name="Shape 28"/>
+          <p:cNvPr id="33" name="Shape 31"/>
           <p:cNvSpPr/>
           <p:nvPr/>
         </p:nvSpPr>
@@ -21322,7 +21614,7 @@
       </p:sp>
       <p:sp>
         <p:nvSpPr>
-          <p:cNvPr id="31" name="Shape 29"/>
+          <p:cNvPr id="34" name="Shape 32"/>
           <p:cNvSpPr/>
           <p:nvPr/>
         </p:nvSpPr>
@@ -21356,7 +21648,7 @@
       </p:sp>
       <p:sp>
         <p:nvSpPr>
-          <p:cNvPr id="32" name="Text 30"/>
+          <p:cNvPr id="35" name="Text 33"/>
           <p:cNvSpPr/>
           <p:nvPr/>
         </p:nvSpPr>
@@ -21397,7 +21689,7 @@
       </p:sp>
       <p:sp>
         <p:nvSpPr>
-          <p:cNvPr id="33" name="Text 31"/>
+          <p:cNvPr id="36" name="Text 34"/>
           <p:cNvSpPr/>
           <p:nvPr/>
         </p:nvSpPr>
@@ -21428,7 +21720,7 @@
                 <a:ea typeface="Hanken Grotesk" pitchFamily="34" charset="-122"/>
                 <a:cs typeface="Hanken Grotesk" pitchFamily="34" charset="-120"/>
               </a:rPr>
-              <a:t>Team 1 knows 3 pounds of chicken cost $18. What was your plan to find the cost of just 1 pound, and why is that unit rate useful?</a:t>
+              <a:t>A 5-kilometer race and a 5-mile race have the same number — 5. Before converting anything: which race is longer, and how do you know?</a:t>
             </a:r>
             <a:endParaRPr lang="en-US" sz="1000" dirty="0"/>
           </a:p>
@@ -21436,7 +21728,7 @@
       </p:sp>
       <p:sp>
         <p:nvSpPr>
-          <p:cNvPr id="34" name="Shape 32"/>
+          <p:cNvPr id="37" name="Shape 35"/>
           <p:cNvSpPr/>
           <p:nvPr/>
         </p:nvSpPr>
@@ -21470,7 +21762,7 @@
       </p:sp>
       <p:sp>
         <p:nvSpPr>
-          <p:cNvPr id="35" name="Text 33"/>
+          <p:cNvPr id="38" name="Text 36"/>
           <p:cNvSpPr/>
           <p:nvPr/>
         </p:nvSpPr>
@@ -21509,7 +21801,7 @@
       </p:sp>
       <p:sp>
         <p:nvSpPr>
-          <p:cNvPr id="36" name="Text 34"/>
+          <p:cNvPr id="39" name="Text 37"/>
           <p:cNvSpPr/>
           <p:nvPr/>
         </p:nvSpPr>
@@ -21540,7 +21832,7 @@
                 <a:ea typeface="Hanken Grotesk" pitchFamily="34" charset="-122"/>
                 <a:cs typeface="Hanken Grotesk" pitchFamily="34" charset="-120"/>
               </a:rPr>
-              <a:t>Find the unit rate by dividing, then multiply it to find the amount you need.</a:t>
+              <a:t>Converting Measurements Between Systems. 1. Identify the conversion ratio connecting systems (e.g. 1 in = 2.54 cm, 1 kg ≈ 2.2 lbs). 2. Set up a ratio table or proportion aligning customary and metric units. 3. Multiply or divide by the conversion factor to compute the equivalent measurement</a:t>
             </a:r>
             <a:endParaRPr lang="en-US" sz="950" dirty="0"/>
           </a:p>
